--- a/lecture_pptx/out/s11/ワーク02.pptx
+++ b/lecture_pptx/out/s11/ワーク02.pptx
@@ -2279,7 +2279,7 @@
         <p:spPr>
           <a:xfrm>
             <a:off x="365760" y="1188720"/>
-            <a:ext cx="1979676" cy="2468880"/>
+            <a:ext cx="1979676" cy="3017520"/>
           </a:xfrm>
           <a:prstGeom prst="roundRect">
             <a:avLst>
@@ -2386,8 +2386,8 @@
         </p:nvSpPr>
         <p:spPr>
           <a:xfrm>
-            <a:off x="530352" y="1901952"/>
-            <a:ext cx="1650492" cy="1645920"/>
+            <a:off x="530352" y="1938528"/>
+            <a:ext cx="1650492" cy="2148840"/>
           </a:xfrm>
           <a:prstGeom prst="rect">
             <a:avLst/>
@@ -2401,12 +2401,12 @@
           <a:p>
             <a:pPr indent="0" marL="0">
               <a:spcAft>
-                <a:spcPts val="200"/>
+                <a:spcPts val="600"/>
               </a:spcAft>
               <a:buNone/>
             </a:pPr>
             <a:r>
-              <a:rPr lang="en-US" sz="1300" dirty="0">
+              <a:rPr lang="en-US" sz="1600" dirty="0">
                 <a:solidFill>
                   <a:srgbClr val="1A1A1A"/>
                 </a:solidFill>
@@ -2416,7 +2416,7 @@
               </a:rPr>
               <a:t>日付・タイトル・配信数・開封数・クリック数を1行ずつ記録した表。</a:t>
             </a:r>
-            <a:endParaRPr lang="en-US" sz="1300" dirty="0"/>
+            <a:endParaRPr lang="en-US" sz="1600" dirty="0"/>
           </a:p>
         </p:txBody>
       </p:sp>
@@ -2429,7 +2429,7 @@
         <p:spPr>
           <a:xfrm>
             <a:off x="2510028" y="1188720"/>
-            <a:ext cx="1979676" cy="2468880"/>
+            <a:ext cx="1979676" cy="3017520"/>
           </a:xfrm>
           <a:prstGeom prst="roundRect">
             <a:avLst>
@@ -2536,8 +2536,8 @@
         </p:nvSpPr>
         <p:spPr>
           <a:xfrm>
-            <a:off x="2674620" y="1901952"/>
-            <a:ext cx="1650492" cy="1645920"/>
+            <a:off x="2674620" y="1938528"/>
+            <a:ext cx="1650492" cy="2148840"/>
           </a:xfrm>
           <a:prstGeom prst="rect">
             <a:avLst/>
@@ -2551,12 +2551,12 @@
           <a:p>
             <a:pPr indent="0" marL="0">
               <a:spcAft>
-                <a:spcPts val="200"/>
+                <a:spcPts val="600"/>
               </a:spcAft>
               <a:buNone/>
             </a:pPr>
             <a:r>
-              <a:rPr lang="en-US" sz="1300" dirty="0">
+              <a:rPr lang="en-US" sz="1600" dirty="0">
                 <a:solidFill>
                   <a:srgbClr val="1A1A1A"/>
                 </a:solidFill>
@@ -2564,9 +2564,26 @@
                 <a:ea typeface="Yu Gothic UI" pitchFamily="34" charset="-122"/>
                 <a:cs typeface="Yu Gothic UI" pitchFamily="34" charset="-120"/>
               </a:rPr>
-              <a:t>配信が表示された件数 ÷ 配信先件数。LINEは表示ベース。</a:t>
-            </a:r>
-            <a:endParaRPr lang="en-US" sz="1300" dirty="0"/>
+              <a:t>配信が表示された件数 ÷ 配信先件数。</a:t>
+            </a:r>
+            <a:pPr indent="0" marL="0">
+              <a:spcAft>
+                <a:spcPts val="600"/>
+              </a:spcAft>
+              <a:buNone/>
+            </a:pPr>
+            <a:r>
+              <a:rPr lang="en-US" sz="1600" dirty="0">
+                <a:solidFill>
+                  <a:srgbClr val="1A1A1A"/>
+                </a:solidFill>
+                <a:latin typeface="Yu Gothic UI" pitchFamily="34" charset="0"/>
+                <a:ea typeface="Yu Gothic UI" pitchFamily="34" charset="-122"/>
+                <a:cs typeface="Yu Gothic UI" pitchFamily="34" charset="-120"/>
+              </a:rPr>
+              <a:t>LINEは表示ベース。</a:t>
+            </a:r>
+            <a:endParaRPr lang="en-US" sz="1600" dirty="0"/>
           </a:p>
         </p:txBody>
       </p:sp>
@@ -2579,7 +2596,7 @@
         <p:spPr>
           <a:xfrm>
             <a:off x="4654296" y="1188720"/>
-            <a:ext cx="1979676" cy="2468880"/>
+            <a:ext cx="1979676" cy="3017520"/>
           </a:xfrm>
           <a:prstGeom prst="roundRect">
             <a:avLst>
@@ -2686,8 +2703,8 @@
         </p:nvSpPr>
         <p:spPr>
           <a:xfrm>
-            <a:off x="4818888" y="1901952"/>
-            <a:ext cx="1650492" cy="1645920"/>
+            <a:off x="4818888" y="1938528"/>
+            <a:ext cx="1650492" cy="2148840"/>
           </a:xfrm>
           <a:prstGeom prst="rect">
             <a:avLst/>
@@ -2701,12 +2718,12 @@
           <a:p>
             <a:pPr indent="0" marL="0">
               <a:spcAft>
-                <a:spcPts val="200"/>
+                <a:spcPts val="600"/>
               </a:spcAft>
               <a:buNone/>
             </a:pPr>
             <a:r>
-              <a:rPr lang="en-US" sz="1300" dirty="0">
+              <a:rPr lang="en-US" sz="1600" dirty="0">
                 <a:solidFill>
                   <a:srgbClr val="1A1A1A"/>
                 </a:solidFill>
@@ -2714,9 +2731,26 @@
                 <a:ea typeface="Yu Gothic UI" pitchFamily="34" charset="-122"/>
                 <a:cs typeface="Yu Gothic UI" pitchFamily="34" charset="-120"/>
               </a:rPr>
-              <a:t>本文内のURL/ボタンがタップされた率。実質のCV指標。</a:t>
-            </a:r>
-            <a:endParaRPr lang="en-US" sz="1300" dirty="0"/>
+              <a:t>本文内のURL/ボタンがタップされた率。</a:t>
+            </a:r>
+            <a:pPr indent="0" marL="0">
+              <a:spcAft>
+                <a:spcPts val="600"/>
+              </a:spcAft>
+              <a:buNone/>
+            </a:pPr>
+            <a:r>
+              <a:rPr lang="en-US" sz="1600" dirty="0">
+                <a:solidFill>
+                  <a:srgbClr val="1A1A1A"/>
+                </a:solidFill>
+                <a:latin typeface="Yu Gothic UI" pitchFamily="34" charset="0"/>
+                <a:ea typeface="Yu Gothic UI" pitchFamily="34" charset="-122"/>
+                <a:cs typeface="Yu Gothic UI" pitchFamily="34" charset="-120"/>
+              </a:rPr>
+              <a:t>実質のCV指標。</a:t>
+            </a:r>
+            <a:endParaRPr lang="en-US" sz="1600" dirty="0"/>
           </a:p>
         </p:txBody>
       </p:sp>
@@ -2729,7 +2763,7 @@
         <p:spPr>
           <a:xfrm>
             <a:off x="6798564" y="1188720"/>
-            <a:ext cx="1979676" cy="2468880"/>
+            <a:ext cx="1979676" cy="3017520"/>
           </a:xfrm>
           <a:prstGeom prst="roundRect">
             <a:avLst>
@@ -2836,8 +2870,8 @@
         </p:nvSpPr>
         <p:spPr>
           <a:xfrm>
-            <a:off x="6963156" y="1901952"/>
-            <a:ext cx="1650492" cy="1645920"/>
+            <a:off x="6963156" y="1938528"/>
+            <a:ext cx="1650492" cy="2148840"/>
           </a:xfrm>
           <a:prstGeom prst="rect">
             <a:avLst/>
@@ -2851,12 +2885,12 @@
           <a:p>
             <a:pPr indent="0" marL="0">
               <a:spcAft>
-                <a:spcPts val="200"/>
+                <a:spcPts val="600"/>
               </a:spcAft>
               <a:buNone/>
             </a:pPr>
             <a:r>
-              <a:rPr lang="en-US" sz="1300" dirty="0">
+              <a:rPr lang="en-US" sz="1600" dirty="0">
                 <a:solidFill>
                   <a:srgbClr val="1A1A1A"/>
                 </a:solidFill>
@@ -2864,9 +2898,26 @@
                 <a:ea typeface="Yu Gothic UI" pitchFamily="34" charset="-122"/>
                 <a:cs typeface="Yu Gothic UI" pitchFamily="34" charset="-120"/>
               </a:rPr>
-              <a:t>Plan→Do→Check→Act のサイクル。週次で回すと変化が見える。</a:t>
-            </a:r>
-            <a:endParaRPr lang="en-US" sz="1300" dirty="0"/>
+              <a:t>Plan→Do→Check→Act のサイクル。</a:t>
+            </a:r>
+            <a:pPr indent="0" marL="0">
+              <a:spcAft>
+                <a:spcPts val="600"/>
+              </a:spcAft>
+              <a:buNone/>
+            </a:pPr>
+            <a:r>
+              <a:rPr lang="en-US" sz="1600" dirty="0">
+                <a:solidFill>
+                  <a:srgbClr val="1A1A1A"/>
+                </a:solidFill>
+                <a:latin typeface="Yu Gothic UI" pitchFamily="34" charset="0"/>
+                <a:ea typeface="Yu Gothic UI" pitchFamily="34" charset="-122"/>
+                <a:cs typeface="Yu Gothic UI" pitchFamily="34" charset="-120"/>
+              </a:rPr>
+              <a:t>週次で回すと変化が見える。</a:t>
+            </a:r>
+            <a:endParaRPr lang="en-US" sz="1600" dirty="0"/>
           </a:p>
         </p:txBody>
       </p:sp>
@@ -2878,8 +2929,8 @@
         </p:nvSpPr>
         <p:spPr>
           <a:xfrm>
-            <a:off x="365760" y="3931920"/>
-            <a:ext cx="8412480" cy="1188720"/>
+            <a:off x="365760" y="4389120"/>
+            <a:ext cx="8412480" cy="914400"/>
           </a:xfrm>
           <a:prstGeom prst="rect">
             <a:avLst/>

--- a/lecture_pptx/out/s11/ワーク02.pptx
+++ b/lecture_pptx/out/s11/ワーク02.pptx
@@ -1551,7 +1551,7 @@
                 <a:ea typeface="Yu Gothic UI Semibold" pitchFamily="34" charset="-122"/>
                 <a:cs typeface="Yu Gothic UI Semibold" pitchFamily="34" charset="-120"/>
               </a:rPr>
-              <a:t>シナリオ本文量産 + 配信ログ分析</a:t>
+              <a:t>AI 応答チャットボット化 (Gemini 連携)</a:t>
             </a:r>
             <a:endParaRPr lang="en-US" sz="3800" dirty="0"/>
           </a:p>
@@ -1590,7 +1590,7 @@
                 <a:ea typeface="Yu Gothic UI" pitchFamily="34" charset="-122"/>
                 <a:cs typeface="Yu Gothic UI" pitchFamily="34" charset="-120"/>
               </a:rPr>
-              <a:t>AIで本文を一気に揃え、配信後はログから次の改善を引き出す</a:t>
+              <a:t>キーワード応答から自然対話へ、AI で「話せる」チャットボットに進化させる</a:t>
             </a:r>
             <a:endParaRPr lang="en-US" sz="1900" dirty="0"/>
           </a:p>
@@ -1806,7 +1806,7 @@
                 <a:ea typeface="Yu Gothic UI Semibold" pitchFamily="34" charset="-122"/>
                 <a:cs typeface="Yu Gothic UI Semibold" pitchFamily="34" charset="-120"/>
               </a:rPr>
-              <a:t>本文をAIで量産</a:t>
+              <a:t>Gemini API を接続</a:t>
             </a:r>
             <a:endParaRPr lang="en-US" sz="1700" dirty="0"/>
           </a:p>
@@ -1845,7 +1845,7 @@
                 <a:ea typeface="Yu Gothic UI" pitchFamily="34" charset="-122"/>
                 <a:cs typeface="Yu Gothic UI" pitchFamily="34" charset="-120"/>
               </a:rPr>
-              <a:t>3層×5日=15通をAIで生成し、自分の言葉で微修正。</a:t>
+              <a:t>GAS から Gemini API を呼び出し、自然な文章で応答する。</a:t>
             </a:r>
             <a:endParaRPr lang="en-US" sz="1300" dirty="0"/>
           </a:p>
@@ -1970,7 +1970,7 @@
                 <a:ea typeface="Yu Gothic UI Semibold" pitchFamily="34" charset="-122"/>
                 <a:cs typeface="Yu Gothic UI Semibold" pitchFamily="34" charset="-120"/>
               </a:rPr>
-              <a:t>配信ログをAI分析</a:t>
+              <a:t>FAQ知識を持たせる</a:t>
             </a:r>
             <a:endParaRPr lang="en-US" sz="1700" dirty="0"/>
           </a:p>
@@ -2009,7 +2009,7 @@
                 <a:ea typeface="Yu Gothic UI" pitchFamily="34" charset="-122"/>
                 <a:cs typeface="Yu Gothic UI" pitchFamily="34" charset="-120"/>
               </a:rPr>
-              <a:t>反応の良い投稿の共通点を AI に抽出させ、改善案を引き出す。</a:t>
+              <a:t>自社の保険FAQ を知識として渡し、根拠のある回答に。</a:t>
             </a:r>
             <a:endParaRPr lang="en-US" sz="1300" dirty="0"/>
           </a:p>
@@ -2134,7 +2134,7 @@
                 <a:ea typeface="Yu Gothic UI Semibold" pitchFamily="34" charset="-122"/>
                 <a:cs typeface="Yu Gothic UI Semibold" pitchFamily="34" charset="-120"/>
               </a:rPr>
-              <a:t>週次PDCAの定着</a:t>
+              <a:t>相談予約へ引き渡し</a:t>
             </a:r>
             <a:endParaRPr lang="en-US" sz="1700" dirty="0"/>
           </a:p>
@@ -2173,7 +2173,7 @@
                 <a:ea typeface="Yu Gothic UI" pitchFamily="34" charset="-122"/>
                 <a:cs typeface="Yu Gothic UI" pitchFamily="34" charset="-120"/>
               </a:rPr>
-              <a:t>毎週月曜に分析→改善→反映のサイクルを回す。</a:t>
+              <a:t>難しい質問はAIが判断して「担当者へ」の導線に切り替え。</a:t>
             </a:r>
             <a:endParaRPr lang="en-US" sz="1300" dirty="0"/>
           </a:p>
@@ -2372,7 +2372,7 @@
                 <a:ea typeface="Yu Gothic UI Semibold" pitchFamily="34" charset="-122"/>
                 <a:cs typeface="Yu Gothic UI Semibold" pitchFamily="34" charset="-120"/>
               </a:rPr>
-              <a:t>本文量産</a:t>
+              <a:t>Gemini API</a:t>
             </a:r>
             <a:endParaRPr lang="en-US" sz="1600" dirty="0"/>
           </a:p>
@@ -2414,7 +2414,7 @@
                 <a:ea typeface="Yu Gothic UI" pitchFamily="34" charset="-122"/>
                 <a:cs typeface="Yu Gothic UI" pitchFamily="34" charset="-120"/>
               </a:rPr>
-              <a:t>シナリオに沿って配信本文を一気に書き上げる作業。</a:t>
+              <a:t>GoogleのAI Gemini を外部プログラムから呼び出すAPI。</a:t>
             </a:r>
             <a:pPr indent="0" marL="0">
               <a:spcAft>
@@ -2431,7 +2431,7 @@
                 <a:ea typeface="Yu Gothic UI" pitchFamily="34" charset="-122"/>
                 <a:cs typeface="Yu Gothic UI" pitchFamily="34" charset="-120"/>
               </a:rPr>
-              <a:t>AIが得意。</a:t>
+              <a:t>GAS からも使える。</a:t>
             </a:r>
             <a:endParaRPr lang="en-US" sz="1600" dirty="0"/>
           </a:p>
@@ -2539,7 +2539,7 @@
                 <a:ea typeface="Yu Gothic UI Semibold" pitchFamily="34" charset="-122"/>
                 <a:cs typeface="Yu Gothic UI Semibold" pitchFamily="34" charset="-120"/>
               </a:rPr>
-              <a:t>配信ログ</a:t>
+              <a:t>システムプロンプト</a:t>
             </a:r>
             <a:endParaRPr lang="en-US" sz="1600" dirty="0"/>
           </a:p>
@@ -2581,7 +2581,24 @@
                 <a:ea typeface="Yu Gothic UI" pitchFamily="34" charset="-122"/>
                 <a:cs typeface="Yu Gothic UI" pitchFamily="34" charset="-120"/>
               </a:rPr>
-              <a:t>日付・タイトル・配信数・開封数・クリック数を1行ずつ記録した表。</a:t>
+              <a:t>AI に「あなたは○○の役割」と最初に伝える指示文。</a:t>
+            </a:r>
+            <a:pPr indent="0" marL="0">
+              <a:spcAft>
+                <a:spcPts val="600"/>
+              </a:spcAft>
+              <a:buNone/>
+            </a:pPr>
+            <a:r>
+              <a:rPr lang="en-US" sz="1600" dirty="0">
+                <a:solidFill>
+                  <a:srgbClr val="1A1A1A"/>
+                </a:solidFill>
+                <a:latin typeface="Yu Gothic UI" pitchFamily="34" charset="0"/>
+                <a:ea typeface="Yu Gothic UI" pitchFamily="34" charset="-122"/>
+                <a:cs typeface="Yu Gothic UI" pitchFamily="34" charset="-120"/>
+              </a:rPr>
+              <a:t>応答の一貫性を担保。</a:t>
             </a:r>
             <a:endParaRPr lang="en-US" sz="1600" dirty="0"/>
           </a:p>
@@ -2689,7 +2706,7 @@
                 <a:ea typeface="Yu Gothic UI Semibold" pitchFamily="34" charset="-122"/>
                 <a:cs typeface="Yu Gothic UI Semibold" pitchFamily="34" charset="-120"/>
               </a:rPr>
-              <a:t>開封率</a:t>
+              <a:t>FAQ 知識</a:t>
             </a:r>
             <a:endParaRPr lang="en-US" sz="1600" dirty="0"/>
           </a:p>
@@ -2731,7 +2748,7 @@
                 <a:ea typeface="Yu Gothic UI" pitchFamily="34" charset="-122"/>
                 <a:cs typeface="Yu Gothic UI" pitchFamily="34" charset="-120"/>
               </a:rPr>
-              <a:t>配信が表示された件数 ÷ 配信先件数。</a:t>
+              <a:t>よくある質問と回答のペアを AI に渡す情報。</a:t>
             </a:r>
             <a:pPr indent="0" marL="0">
               <a:spcAft>
@@ -2748,7 +2765,7 @@
                 <a:ea typeface="Yu Gothic UI" pitchFamily="34" charset="-122"/>
                 <a:cs typeface="Yu Gothic UI" pitchFamily="34" charset="-120"/>
               </a:rPr>
-              <a:t>LINEは表示ベース。</a:t>
+              <a:t>応答の正確性が上がる。</a:t>
             </a:r>
             <a:endParaRPr lang="en-US" sz="1600" dirty="0"/>
           </a:p>
@@ -2856,7 +2873,7 @@
                 <a:ea typeface="Yu Gothic UI Semibold" pitchFamily="34" charset="-122"/>
                 <a:cs typeface="Yu Gothic UI Semibold" pitchFamily="34" charset="-120"/>
               </a:rPr>
-              <a:t>PDCA</a:t>
+              <a:t>ハンドオフ</a:t>
             </a:r>
             <a:endParaRPr lang="en-US" sz="1600" dirty="0"/>
           </a:p>
@@ -2898,24 +2915,7 @@
                 <a:ea typeface="Yu Gothic UI" pitchFamily="34" charset="-122"/>
                 <a:cs typeface="Yu Gothic UI" pitchFamily="34" charset="-120"/>
               </a:rPr>
-              <a:t>Plan→Do→Check→Act のサイクル。</a:t>
-            </a:r>
-            <a:pPr indent="0" marL="0">
-              <a:spcAft>
-                <a:spcPts val="600"/>
-              </a:spcAft>
-              <a:buNone/>
-            </a:pPr>
-            <a:r>
-              <a:rPr lang="en-US" sz="1600" dirty="0">
-                <a:solidFill>
-                  <a:srgbClr val="1A1A1A"/>
-                </a:solidFill>
-                <a:latin typeface="Yu Gothic UI" pitchFamily="34" charset="0"/>
-                <a:ea typeface="Yu Gothic UI" pitchFamily="34" charset="-122"/>
-                <a:cs typeface="Yu Gothic UI" pitchFamily="34" charset="-120"/>
-              </a:rPr>
-              <a:t>週次で回すと変化が見える。</a:t>
+              <a:t>AIが対応困難と判断した会話を、人間の担当者に引き継ぐ仕組み。</a:t>
             </a:r>
             <a:endParaRPr lang="en-US" sz="1600" dirty="0"/>
           </a:p>
@@ -2968,7 +2968,7 @@
                 <a:ea typeface="Yu Gothic UI" pitchFamily="34" charset="-122"/>
                 <a:cs typeface="Yu Gothic UI" pitchFamily="34" charset="-120"/>
               </a:rPr>
-              <a:t>本文量産: </a:t>
+              <a:t>Gemini API: </a:t>
             </a:r>
             <a:pPr indent="0" marL="0">
               <a:buNone/>
@@ -2982,7 +2982,7 @@
                 <a:ea typeface="Yu Gothic UI" pitchFamily="34" charset="-122"/>
                 <a:cs typeface="Yu Gothic UI" pitchFamily="34" charset="-120"/>
               </a:rPr>
-              <a:t>15通を30分以内が目安   </a:t>
+              <a:t>API キーが必要、無料枠あり   </a:t>
             </a:r>
             <a:pPr indent="0" marL="0">
               <a:buNone/>
@@ -3010,7 +3010,7 @@
                 <a:ea typeface="Yu Gothic UI" pitchFamily="34" charset="-122"/>
                 <a:cs typeface="Yu Gothic UI" pitchFamily="34" charset="-120"/>
               </a:rPr>
-              <a:t>配信ログ: </a:t>
+              <a:t>システムプロンプト: </a:t>
             </a:r>
             <a:pPr indent="0" marL="0">
               <a:buNone/>
@@ -3024,7 +3024,7 @@
                 <a:ea typeface="Yu Gothic UI" pitchFamily="34" charset="-122"/>
                 <a:cs typeface="Yu Gothic UI" pitchFamily="34" charset="-120"/>
               </a:rPr>
-              <a:t>まずスプシで地道に記録   </a:t>
+              <a:t>毎回の会話の頭に付ける   </a:t>
             </a:r>
             <a:pPr indent="0" marL="0">
               <a:buNone/>
@@ -3052,7 +3052,7 @@
                 <a:ea typeface="Yu Gothic UI" pitchFamily="34" charset="-122"/>
                 <a:cs typeface="Yu Gothic UI" pitchFamily="34" charset="-120"/>
               </a:rPr>
-              <a:t>開封率: </a:t>
+              <a:t>FAQ 知識: </a:t>
             </a:r>
             <a:pPr indent="0" marL="0">
               <a:buNone/>
@@ -3066,7 +3066,7 @@
                 <a:ea typeface="Yu Gothic UI" pitchFamily="34" charset="-122"/>
                 <a:cs typeface="Yu Gothic UI" pitchFamily="34" charset="-120"/>
               </a:rPr>
-              <a:t>20% が一つの目安   </a:t>
+              <a:t>PDFやテキストで用意   </a:t>
             </a:r>
             <a:pPr indent="0" marL="0">
               <a:buNone/>
@@ -3094,7 +3094,7 @@
                 <a:ea typeface="Yu Gothic UI" pitchFamily="34" charset="-122"/>
                 <a:cs typeface="Yu Gothic UI" pitchFamily="34" charset="-120"/>
               </a:rPr>
-              <a:t>PDCA: </a:t>
+              <a:t>ハンドオフ: </a:t>
             </a:r>
             <a:pPr indent="0" marL="0">
               <a:buNone/>
@@ -3108,7 +3108,7 @@
                 <a:ea typeface="Yu Gothic UI" pitchFamily="34" charset="-122"/>
                 <a:cs typeface="Yu Gothic UI" pitchFamily="34" charset="-120"/>
               </a:rPr>
-              <a:t>月次だと遅すぎる</a:t>
+              <a:t>事故防止の生命線</a:t>
             </a:r>
             <a:endParaRPr lang="en-US" sz="1100" dirty="0"/>
           </a:p>
@@ -3199,7 +3199,7 @@
                 <a:ea typeface="Yu Gothic UI Semibold" pitchFamily="34" charset="-122"/>
                 <a:cs typeface="Yu Gothic UI Semibold" pitchFamily="34" charset="-120"/>
               </a:rPr>
-              <a:t>演習1 シナリオ本文を AI で量産</a:t>
+              <a:t>演習1 Gemini API を組み込んで AI 応答化</a:t>
             </a:r>
             <a:endParaRPr lang="en-US" sz="2600" dirty="0"/>
           </a:p>
@@ -3327,7 +3327,7 @@
                 <a:ea typeface="Yu Gothic UI" pitchFamily="34" charset="-122"/>
                 <a:cs typeface="Yu Gothic UI" pitchFamily="34" charset="-120"/>
               </a:rPr>
-              <a:t>【場面】シナリオ(3層×5日)は決まったが、本文を15通書くのは大変。AI で一気に量産する。</a:t>
+              <a:t>【場面】キーワード応答は動いたが、想定外の質問に返せない。Gemini API を組み込んで自然対話を可能にする。</a:t>
             </a:r>
             <a:endParaRPr lang="en-US" sz="1400" dirty="0"/>
           </a:p>
@@ -3456,7 +3456,7 @@
                 <a:ea typeface="Yu Gothic UI" pitchFamily="34" charset="-122"/>
                 <a:cs typeface="Yu Gothic UI" pitchFamily="34" charset="-120"/>
               </a:rPr>
-              <a:t>Gemini に「演習(基礎)のシナリオ+3軸を踏まえて15通量産」と依頼</a:t>
+              <a:t>Gemini に「GAS から Gemini API を呼ぶコード」を依頼</a:t>
             </a:r>
             <a:endParaRPr lang="en-US" sz="1400" dirty="0"/>
           </a:p>
@@ -3477,7 +3477,7 @@
                 <a:ea typeface="Yu Gothic UI" pitchFamily="34" charset="-122"/>
                 <a:cs typeface="Yu Gothic UI" pitchFamily="34" charset="-120"/>
               </a:rPr>
-              <a:t>生成後は1通ずつ「自分の言葉」に微修正</a:t>
+              <a:t>システムプロンプトに「詳細相談は担当者に繋ぐ」ルールを含める</a:t>
             </a:r>
             <a:endParaRPr lang="en-US" sz="1400" dirty="0"/>
           </a:p>
@@ -3498,7 +3498,7 @@
                 <a:ea typeface="Yu Gothic UI" pitchFamily="34" charset="-122"/>
                 <a:cs typeface="Yu Gothic UI" pitchFamily="34" charset="-120"/>
               </a:rPr>
-              <a:t>層別フォルダ分けで管理</a:t>
+              <a:t>返信は200文字以内に制限(LINE で読みやすく)</a:t>
             </a:r>
             <a:endParaRPr lang="en-US" sz="1400" dirty="0"/>
           </a:p>
@@ -3519,7 +3519,7 @@
                 <a:ea typeface="Yu Gothic UI" pitchFamily="34" charset="-122"/>
                 <a:cs typeface="Yu Gothic UI" pitchFamily="34" charset="-120"/>
               </a:rPr>
-              <a:t>LINEで読みやすいよう声に出して音読チェック</a:t>
+              <a:t>API 呼び出し失敗時のフォールバック(定型返答)も入れる</a:t>
             </a:r>
             <a:endParaRPr lang="en-US" sz="1400" dirty="0"/>
           </a:p>
@@ -3648,7 +3648,7 @@
                 <a:ea typeface="Yu Gothic UI" pitchFamily="34" charset="-122"/>
                 <a:cs typeface="Yu Gothic UI" pitchFamily="34" charset="-120"/>
               </a:rPr>
-              <a:t>【ゴール】3層×5日=15通の本文を AI で生成</a:t>
+              <a:t>【ゴール】Google AI Studio で Gemini API キーを取得</a:t>
             </a:r>
             <a:endParaRPr lang="en-US" sz="1400" dirty="0"/>
           </a:p>
@@ -3669,7 +3669,7 @@
                 <a:ea typeface="Yu Gothic UI" pitchFamily="34" charset="-122"/>
                 <a:cs typeface="Yu Gothic UI" pitchFamily="34" charset="-120"/>
               </a:rPr>
-              <a:t>各本文は300文字以内、絵文字+改行入り</a:t>
+              <a:t>GAS のスクリプトプロパティに API キーを保存</a:t>
             </a:r>
             <a:endParaRPr lang="en-US" sz="1400" dirty="0"/>
           </a:p>
@@ -3690,7 +3690,7 @@
                 <a:ea typeface="Yu Gothic UI" pitchFamily="34" charset="-122"/>
                 <a:cs typeface="Yu Gothic UI" pitchFamily="34" charset="-120"/>
               </a:rPr>
-              <a:t>層別のトーン(高=直球/中=柔/低=教育)が反映</a:t>
+              <a:t>キーワードに当てはまらない質問を Gemini に投げて返信する処理を追加</a:t>
             </a:r>
             <a:endParaRPr lang="en-US" sz="1400" dirty="0"/>
           </a:p>
@@ -3711,7 +3711,28 @@
                 <a:ea typeface="Yu Gothic UI" pitchFamily="34" charset="-122"/>
                 <a:cs typeface="Yu Gothic UI" pitchFamily="34" charset="-120"/>
               </a:rPr>
-              <a:t>スプシに層×日のマトリクスで保存し、ステップ配信機能に登録</a:t>
+              <a:t>システムプロンプトで「保険営業一次受けのAI」と役割設定</a:t>
+            </a:r>
+            <a:endParaRPr lang="en-US" sz="1400" dirty="0"/>
+          </a:p>
+          <a:p>
+            <a:pPr marL="342900" indent="-342900">
+              <a:spcAft>
+                <a:spcPts val="400"/>
+              </a:spcAft>
+              <a:buSzPct val="100000"/>
+              <a:buChar char="●"/>
+            </a:pPr>
+            <a:r>
+              <a:rPr lang="en-US" sz="1400" dirty="0">
+                <a:solidFill>
+                  <a:srgbClr val="1A1A1A"/>
+                </a:solidFill>
+                <a:latin typeface="Yu Gothic UI" pitchFamily="34" charset="0"/>
+                <a:ea typeface="Yu Gothic UI" pitchFamily="34" charset="-122"/>
+                <a:cs typeface="Yu Gothic UI" pitchFamily="34" charset="-120"/>
+              </a:rPr>
+              <a:t>実機で自由入力(例:「学資保険どうしたら?」) に応答が返るか確認</a:t>
             </a:r>
             <a:endParaRPr lang="en-US" sz="1400" dirty="0"/>
           </a:p>
@@ -3802,7 +3823,7 @@
                 <a:ea typeface="Yu Gothic UI Semibold" pitchFamily="34" charset="-122"/>
                 <a:cs typeface="Yu Gothic UI Semibold" pitchFamily="34" charset="-120"/>
               </a:rPr>
-              <a:t>演習1 シナリオ本文を AI で量産 — 観点別チェック</a:t>
+              <a:t>演習1 Gemini API を組み込んで AI 応答化 — 観点別チェック</a:t>
             </a:r>
             <a:endParaRPr lang="en-US" sz="2600" dirty="0"/>
           </a:p>
@@ -3966,7 +3987,7 @@
                 <a:ea typeface="Yu Gothic UI Semibold" pitchFamily="34" charset="-122"/>
                 <a:cs typeface="Yu Gothic UI Semibold" pitchFamily="34" charset="-120"/>
               </a:rPr>
-              <a:t>A. 本文の手触り</a:t>
+              <a:t>A. 役割設定の明確化</a:t>
             </a:r>
             <a:endParaRPr lang="en-US" sz="1500" dirty="0"/>
           </a:p>
@@ -4019,7 +4040,7 @@
                 <a:ea typeface="Yu Gothic UI" pitchFamily="34" charset="-122"/>
                 <a:cs typeface="Yu Gothic UI" pitchFamily="34" charset="-120"/>
               </a:rPr>
-              <a:t>機械的でなく、自分が話しているように読めるか</a:t>
+              <a:t>システムプロンプトで「保険一次受け」の役割が定義できているか</a:t>
             </a:r>
             <a:endParaRPr lang="en-US" sz="1300" dirty="0"/>
           </a:p>
@@ -4072,7 +4093,7 @@
                 <a:ea typeface="Yu Gothic UI" pitchFamily="34" charset="-122"/>
                 <a:cs typeface="Yu Gothic UI" pitchFamily="34" charset="-120"/>
               </a:rPr>
-              <a:t>声に出して読む、口語に直す</a:t>
+              <a:t>ロール+ルール+口調 の3要素を含める</a:t>
             </a:r>
             <a:endParaRPr lang="en-US" sz="1300" dirty="0"/>
           </a:p>
@@ -4197,7 +4218,7 @@
                 <a:ea typeface="Yu Gothic UI Semibold" pitchFamily="34" charset="-122"/>
                 <a:cs typeface="Yu Gothic UI Semibold" pitchFamily="34" charset="-120"/>
               </a:rPr>
-              <a:t>B. CTA の強弱</a:t>
+              <a:t>B. 文字数制御</a:t>
             </a:r>
             <a:endParaRPr lang="en-US" sz="1500" dirty="0"/>
           </a:p>
@@ -4250,7 +4271,7 @@
                 <a:ea typeface="Yu Gothic UI" pitchFamily="34" charset="-122"/>
                 <a:cs typeface="Yu Gothic UI" pitchFamily="34" charset="-120"/>
               </a:rPr>
-              <a:t>層に応じて CTA の強さが変わっているか</a:t>
+              <a:t>応答が長すぎず LINE で読みやすいか</a:t>
             </a:r>
             <a:endParaRPr lang="en-US" sz="1300" dirty="0"/>
           </a:p>
@@ -4303,7 +4324,7 @@
                 <a:ea typeface="Yu Gothic UI" pitchFamily="34" charset="-122"/>
                 <a:cs typeface="Yu Gothic UI" pitchFamily="34" charset="-120"/>
               </a:rPr>
-              <a:t>高=「予約する」/低=「気になったら返信を」</a:t>
+              <a:t>プロンプトで「200文字以内」を明示</a:t>
             </a:r>
             <a:endParaRPr lang="en-US" sz="1300" dirty="0"/>
           </a:p>
@@ -4428,7 +4449,7 @@
                 <a:ea typeface="Yu Gothic UI Semibold" pitchFamily="34" charset="-122"/>
                 <a:cs typeface="Yu Gothic UI Semibold" pitchFamily="34" charset="-120"/>
               </a:rPr>
-              <a:t>C. 冗長性</a:t>
+              <a:t>C. ハルシネーション対策</a:t>
             </a:r>
             <a:endParaRPr lang="en-US" sz="1500" dirty="0"/>
           </a:p>
@@ -4481,7 +4502,7 @@
                 <a:ea typeface="Yu Gothic UI" pitchFamily="34" charset="-122"/>
                 <a:cs typeface="Yu Gothic UI" pitchFamily="34" charset="-120"/>
               </a:rPr>
-              <a:t>無駄に長い文や繰り返しがないか</a:t>
+              <a:t>AI が知らない情報を作らないか</a:t>
             </a:r>
             <a:endParaRPr lang="en-US" sz="1300" dirty="0"/>
           </a:p>
@@ -4534,7 +4555,7 @@
                 <a:ea typeface="Yu Gothic UI" pitchFamily="34" charset="-122"/>
                 <a:cs typeface="Yu Gothic UI" pitchFamily="34" charset="-120"/>
               </a:rPr>
-              <a:t>1文40文字以内、二文連続は避ける</a:t>
+              <a:t>「不明なら不明と答えて、担当者へ繋ぐ」を厳命</a:t>
             </a:r>
             <a:endParaRPr lang="en-US" sz="1300" dirty="0"/>
           </a:p>
@@ -4625,7 +4646,7 @@
                 <a:ea typeface="Yu Gothic UI Semibold" pitchFamily="34" charset="-122"/>
                 <a:cs typeface="Yu Gothic UI Semibold" pitchFamily="34" charset="-120"/>
               </a:rPr>
-              <a:t>演習2 配信ログをAIで分析+週次PDCA</a:t>
+              <a:t>演習2 FAQ知識 + ハンドオフ設計</a:t>
             </a:r>
             <a:endParaRPr lang="en-US" sz="2600" dirty="0"/>
           </a:p>
@@ -4753,7 +4774,7 @@
                 <a:ea typeface="Yu Gothic UI" pitchFamily="34" charset="-122"/>
                 <a:cs typeface="Yu Gothic UI" pitchFamily="34" charset="-120"/>
               </a:rPr>
-              <a:t>【場面】配信は続けているが、何が当たって何が外したか分からない。AI に分析させて改善を仕組み化。</a:t>
+              <a:t>AI 応答は動くが「正しい情報」の担保が必要。自社FAQ を渡し、対応困難な相談は担当者に自動引き渡す設計にする。</a:t>
             </a:r>
             <a:endParaRPr lang="en-US" sz="1400" dirty="0"/>
           </a:p>
@@ -4882,7 +4903,7 @@
                 <a:ea typeface="Yu Gothic UI" pitchFamily="34" charset="-122"/>
                 <a:cs typeface="Yu Gothic UI" pitchFamily="34" charset="-120"/>
               </a:rPr>
-              <a:t>CSVを貼って「私が知りたい目的」を先に書いてから依頼</a:t>
+              <a:t>FAQは Q&amp;A ペアで整形しておく(構造化)</a:t>
             </a:r>
             <a:endParaRPr lang="en-US" sz="1400" dirty="0"/>
           </a:p>
@@ -4903,7 +4924,7 @@
                 <a:ea typeface="Yu Gothic UI" pitchFamily="34" charset="-122"/>
                 <a:cs typeface="Yu Gothic UI" pitchFamily="34" charset="-120"/>
               </a:rPr>
-              <a:t>改善案は「変更箇所+変更後の文言」まで具体的に</a:t>
+              <a:t>ハンドオフ判定は AI に「引き渡し必要と判断したら [HANDOFF] を返せ」と指示</a:t>
             </a:r>
             <a:endParaRPr lang="en-US" sz="1400" dirty="0"/>
           </a:p>
@@ -4924,7 +4945,7 @@
                 <a:ea typeface="Yu Gothic UI" pitchFamily="34" charset="-122"/>
                 <a:cs typeface="Yu Gothic UI" pitchFamily="34" charset="-120"/>
               </a:rPr>
-              <a:t>改善は必ず1個に絞る(複数だと続かない)</a:t>
+              <a:t>[HANDOFF] が返ったら GAS 側で相談員にメール通知</a:t>
             </a:r>
             <a:endParaRPr lang="en-US" sz="1400" dirty="0"/>
           </a:p>
@@ -4945,7 +4966,7 @@
                 <a:ea typeface="Yu Gothic UI" pitchFamily="34" charset="-122"/>
                 <a:cs typeface="Yu Gothic UI" pitchFamily="34" charset="-120"/>
               </a:rPr>
-              <a:t>結果はスプシの「学び」シートに保管</a:t>
+              <a:t>テストは既知FAQ / 未知の質問 / 不適切な質問 の3種</a:t>
             </a:r>
             <a:endParaRPr lang="en-US" sz="1400" dirty="0"/>
           </a:p>
@@ -5074,7 +5095,7 @@
                 <a:ea typeface="Yu Gothic UI" pitchFamily="34" charset="-122"/>
                 <a:cs typeface="Yu Gothic UI" pitchFamily="34" charset="-120"/>
               </a:rPr>
-              <a:t>【ゴール】過去30〜90日の配信ログをスプシに整える</a:t>
+              <a:t>自社の保険FAQ(15〜20項目)をテキストで用意</a:t>
             </a:r>
             <a:endParaRPr lang="en-US" sz="1400" dirty="0"/>
           </a:p>
@@ -5095,7 +5116,7 @@
                 <a:ea typeface="Yu Gothic UI" pitchFamily="34" charset="-122"/>
                 <a:cs typeface="Yu Gothic UI" pitchFamily="34" charset="-120"/>
               </a:rPr>
-              <a:t>Gemini に渡して「反応の良い投稿の共通点 5つ」抽出</a:t>
+              <a:t>GAS でリクエスト時に FAQ をシステムプロンプトに含める(または Gem を作って知識登録)</a:t>
             </a:r>
             <a:endParaRPr lang="en-US" sz="1400" dirty="0"/>
           </a:p>
@@ -5116,7 +5137,7 @@
                 <a:ea typeface="Yu Gothic UI" pitchFamily="34" charset="-122"/>
                 <a:cs typeface="Yu Gothic UI" pitchFamily="34" charset="-120"/>
               </a:rPr>
-              <a:t>改善案を「優先度高/中/低」で5つ出してもらう</a:t>
+              <a:t>AI が「対応困難」と判断した時、自動で「担当者に繋ぎます」に切り替えて相談員通知メール送信</a:t>
             </a:r>
             <a:endParaRPr lang="en-US" sz="1400" dirty="0"/>
           </a:p>
@@ -5137,7 +5158,7 @@
                 <a:ea typeface="Yu Gothic UI" pitchFamily="34" charset="-122"/>
                 <a:cs typeface="Yu Gothic UI" pitchFamily="34" charset="-120"/>
               </a:rPr>
-              <a:t>週次レビューシート(学び/来週試す1点)を作って運用開始</a:t>
+              <a:t>5パターンのテスト質問で「FAQ回答/AI回答/ハンドオフ」の判定精度を確認</a:t>
             </a:r>
             <a:endParaRPr lang="en-US" sz="1400" dirty="0"/>
           </a:p>
@@ -5228,7 +5249,7 @@
                 <a:ea typeface="Yu Gothic UI Semibold" pitchFamily="34" charset="-122"/>
                 <a:cs typeface="Yu Gothic UI Semibold" pitchFamily="34" charset="-120"/>
               </a:rPr>
-              <a:t>演習2 配信ログをAIで分析+週次PDCA — 観点別チェック</a:t>
+              <a:t>演習2 FAQ知識 + ハンドオフ設計 — 観点別チェック</a:t>
             </a:r>
             <a:endParaRPr lang="en-US" sz="2600" dirty="0"/>
           </a:p>
@@ -5392,7 +5413,7 @@
                 <a:ea typeface="Yu Gothic UI Semibold" pitchFamily="34" charset="-122"/>
                 <a:cs typeface="Yu Gothic UI Semibold" pitchFamily="34" charset="-120"/>
               </a:rPr>
-              <a:t>A. データの整形</a:t>
+              <a:t>A. FAQの網羅性</a:t>
             </a:r>
             <a:endParaRPr lang="en-US" sz="1500" dirty="0"/>
           </a:p>
@@ -5445,7 +5466,7 @@
                 <a:ea typeface="Yu Gothic UI" pitchFamily="34" charset="-122"/>
                 <a:cs typeface="Yu Gothic UI" pitchFamily="34" charset="-120"/>
               </a:rPr>
-              <a:t>AIが処理しやすい列構造になっているか</a:t>
+              <a:t>頻出15〜20項目をカバーしているか</a:t>
             </a:r>
             <a:endParaRPr lang="en-US" sz="1300" dirty="0"/>
           </a:p>
@@ -5498,7 +5519,7 @@
                 <a:ea typeface="Yu Gothic UI" pitchFamily="34" charset="-122"/>
                 <a:cs typeface="Yu Gothic UI" pitchFamily="34" charset="-120"/>
               </a:rPr>
-              <a:t>日付/タイトル/数値 の3要素を必ず分ける</a:t>
+              <a:t>過去の問い合わせログから選定</a:t>
             </a:r>
             <a:endParaRPr lang="en-US" sz="1300" dirty="0"/>
           </a:p>
@@ -5623,7 +5644,7 @@
                 <a:ea typeface="Yu Gothic UI Semibold" pitchFamily="34" charset="-122"/>
                 <a:cs typeface="Yu Gothic UI Semibold" pitchFamily="34" charset="-120"/>
               </a:rPr>
-              <a:t>B. 仮説思考</a:t>
+              <a:t>B. ハンドオフ判定の妥当性</a:t>
             </a:r>
             <a:endParaRPr lang="en-US" sz="1500" dirty="0"/>
           </a:p>
@@ -5676,7 +5697,7 @@
                 <a:ea typeface="Yu Gothic UI" pitchFamily="34" charset="-122"/>
                 <a:cs typeface="Yu Gothic UI" pitchFamily="34" charset="-120"/>
               </a:rPr>
-              <a:t>「自分の仮説」を持って分析を依頼しているか</a:t>
+              <a:t>AI が「引き渡し」判断できるか</a:t>
             </a:r>
             <a:endParaRPr lang="en-US" sz="1300" dirty="0"/>
           </a:p>
@@ -5729,7 +5750,7 @@
                 <a:ea typeface="Yu Gothic UI" pitchFamily="34" charset="-122"/>
                 <a:cs typeface="Yu Gothic UI" pitchFamily="34" charset="-120"/>
               </a:rPr>
-              <a:t>「夜配信の方が反応良いと思う、どう?」と仮説を投げる</a:t>
+              <a:t>判断基準をプロンプトに具体的に列挙</a:t>
             </a:r>
             <a:endParaRPr lang="en-US" sz="1300" dirty="0"/>
           </a:p>
@@ -5854,7 +5875,7 @@
                 <a:ea typeface="Yu Gothic UI Semibold" pitchFamily="34" charset="-122"/>
                 <a:cs typeface="Yu Gothic UI Semibold" pitchFamily="34" charset="-120"/>
               </a:rPr>
-              <a:t>C. 実行可能性</a:t>
+              <a:t>C. 通知の運用性</a:t>
             </a:r>
             <a:endParaRPr lang="en-US" sz="1500" dirty="0"/>
           </a:p>
@@ -5907,7 +5928,7 @@
                 <a:ea typeface="Yu Gothic UI" pitchFamily="34" charset="-122"/>
                 <a:cs typeface="Yu Gothic UI" pitchFamily="34" charset="-120"/>
               </a:rPr>
-              <a:t>改善案が「来週1人で30分以内」に絞れているか</a:t>
+              <a:t>相談員に届く通知が実用的か</a:t>
             </a:r>
             <a:endParaRPr lang="en-US" sz="1300" dirty="0"/>
           </a:p>
@@ -5960,7 +5981,7 @@
                 <a:ea typeface="Yu Gothic UI" pitchFamily="34" charset="-122"/>
                 <a:cs typeface="Yu Gothic UI" pitchFamily="34" charset="-120"/>
               </a:rPr>
-              <a:t>「30分以内で1点」と AI に制約を伝える</a:t>
+              <a:t>メール本文に会話履歴+ユーザーIDを必ず含める</a:t>
             </a:r>
             <a:endParaRPr lang="en-US" sz="1300" dirty="0"/>
           </a:p>
@@ -6156,7 +6177,7 @@
                 <a:ea typeface="Yu Gothic UI Semibold" pitchFamily="34" charset="-122"/>
                 <a:cs typeface="Yu Gothic UI Semibold" pitchFamily="34" charset="-120"/>
               </a:rPr>
-              <a:t>AI で量産は当たり前</a:t>
+              <a:t>キーワードから対話へ</a:t>
             </a:r>
             <a:endParaRPr lang="en-US" sz="1800" dirty="0"/>
           </a:p>
@@ -6195,7 +6216,7 @@
                 <a:ea typeface="Yu Gothic UI" pitchFamily="34" charset="-122"/>
                 <a:cs typeface="Yu Gothic UI" pitchFamily="34" charset="-120"/>
               </a:rPr>
-              <a:t>15通の本文も30分で揃う。微修正に時間を使う。</a:t>
+              <a:t>Gemini API で「話せるチャットボット」が今日中に完成。</a:t>
             </a:r>
             <a:endParaRPr lang="en-US" sz="1300" dirty="0"/>
           </a:p>
@@ -6300,7 +6321,7 @@
                 <a:ea typeface="Yu Gothic UI Semibold" pitchFamily="34" charset="-122"/>
                 <a:cs typeface="Yu Gothic UI Semibold" pitchFamily="34" charset="-120"/>
               </a:rPr>
-              <a:t>AI に分析を任せる</a:t>
+              <a:t>FAQ知識で精度UP</a:t>
             </a:r>
             <a:endParaRPr lang="en-US" sz="1800" dirty="0"/>
           </a:p>
@@ -6339,7 +6360,7 @@
                 <a:ea typeface="Yu Gothic UI" pitchFamily="34" charset="-122"/>
                 <a:cs typeface="Yu Gothic UI" pitchFamily="34" charset="-120"/>
               </a:rPr>
-              <a:t>人間は「目的」を伝え、AI に共通点抽出を任せる役割分担。</a:t>
+              <a:t>知識を渡すと根拠のある回答に、ハルシネーション激減。</a:t>
             </a:r>
             <a:endParaRPr lang="en-US" sz="1300" dirty="0"/>
           </a:p>
@@ -6444,7 +6465,7 @@
                 <a:ea typeface="Yu Gothic UI Semibold" pitchFamily="34" charset="-122"/>
                 <a:cs typeface="Yu Gothic UI Semibold" pitchFamily="34" charset="-120"/>
               </a:rPr>
-              <a:t>週次PDCA で配信が育つ</a:t>
+              <a:t>AIと人の分業</a:t>
             </a:r>
             <a:endParaRPr lang="en-US" sz="1800" dirty="0"/>
           </a:p>
@@ -6483,7 +6504,7 @@
                 <a:ea typeface="Yu Gothic UI" pitchFamily="34" charset="-122"/>
                 <a:cs typeface="Yu Gothic UI" pitchFamily="34" charset="-120"/>
               </a:rPr>
-              <a:t>小さな改善を毎週積み重ねれば3ヶ月で大きく変わる。</a:t>
+              <a:t>AI は一次受け、難しい相談は人にバトン。事故を防いで信頼を守る。</a:t>
             </a:r>
             <a:endParaRPr lang="en-US" sz="1300" dirty="0"/>
           </a:p>

--- a/lecture_pptx/out/s11/ワーク02.pptx
+++ b/lecture_pptx/out/s11/ワーク02.pptx
@@ -1551,7 +1551,7 @@
                 <a:ea typeface="Yu Gothic UI Semibold" pitchFamily="34" charset="-122"/>
                 <a:cs typeface="Yu Gothic UI Semibold" pitchFamily="34" charset="-120"/>
               </a:rPr>
-              <a:t>AI 応答チャットボット化 (Gemini 連携)</a:t>
+              <a:t>FAQ チャットボットを GAS で作って公開</a:t>
             </a:r>
             <a:endParaRPr lang="en-US" sz="3800" dirty="0"/>
           </a:p>
@@ -1590,7 +1590,7 @@
                 <a:ea typeface="Yu Gothic UI" pitchFamily="34" charset="-122"/>
                 <a:cs typeface="Yu Gothic UI" pitchFamily="34" charset="-120"/>
               </a:rPr>
-              <a:t>キーワード応答から自然対話へ、AI で「話せる」チャットボットに進化させる</a:t>
+              <a:t>ナレッジを集め → Gemini で GAS Web アプリを生成 → デプロイしてリッチメニューに載せる</a:t>
             </a:r>
             <a:endParaRPr lang="en-US" sz="1900" dirty="0"/>
           </a:p>
@@ -1806,7 +1806,7 @@
                 <a:ea typeface="Yu Gothic UI Semibold" pitchFamily="34" charset="-122"/>
                 <a:cs typeface="Yu Gothic UI Semibold" pitchFamily="34" charset="-120"/>
               </a:rPr>
-              <a:t>Gemini API を接続</a:t>
+              <a:t>FAQ ナレッジ設計</a:t>
             </a:r>
             <a:endParaRPr lang="en-US" sz="1700" dirty="0"/>
           </a:p>
@@ -1845,7 +1845,7 @@
                 <a:ea typeface="Yu Gothic UI" pitchFamily="34" charset="-122"/>
                 <a:cs typeface="Yu Gothic UI" pitchFamily="34" charset="-120"/>
               </a:rPr>
-              <a:t>GAS から Gemini API を呼び出し、自然な文章で応答する。</a:t>
+              <a:t>想定される Q&amp;A をスプシに集めて、チャットボットの「脳」を作る。</a:t>
             </a:r>
             <a:endParaRPr lang="en-US" sz="1300" dirty="0"/>
           </a:p>
@@ -1970,7 +1970,7 @@
                 <a:ea typeface="Yu Gothic UI Semibold" pitchFamily="34" charset="-122"/>
                 <a:cs typeface="Yu Gothic UI Semibold" pitchFamily="34" charset="-120"/>
               </a:rPr>
-              <a:t>FAQ知識を持たせる</a:t>
+              <a:t>Gemini × GAS でバイブコーディング</a:t>
             </a:r>
             <a:endParaRPr lang="en-US" sz="1700" dirty="0"/>
           </a:p>
@@ -2009,7 +2009,7 @@
                 <a:ea typeface="Yu Gothic UI" pitchFamily="34" charset="-122"/>
                 <a:cs typeface="Yu Gothic UI" pitchFamily="34" charset="-120"/>
               </a:rPr>
-              <a:t>自社の保険FAQ を知識として渡し、根拠のある回答に。</a:t>
+              <a:t>Gemini に「この FAQ で動く GAS Web アプリを書いて」と依頼、生成コードを貼って実行。</a:t>
             </a:r>
             <a:endParaRPr lang="en-US" sz="1300" dirty="0"/>
           </a:p>
@@ -2134,7 +2134,7 @@
                 <a:ea typeface="Yu Gothic UI Semibold" pitchFamily="34" charset="-122"/>
                 <a:cs typeface="Yu Gothic UI Semibold" pitchFamily="34" charset="-120"/>
               </a:rPr>
-              <a:t>相談予約へ引き渡し</a:t>
+              <a:t>デプロイ + リッチメニュー配置</a:t>
             </a:r>
             <a:endParaRPr lang="en-US" sz="1700" dirty="0"/>
           </a:p>
@@ -2173,7 +2173,7 @@
                 <a:ea typeface="Yu Gothic UI" pitchFamily="34" charset="-122"/>
                 <a:cs typeface="Yu Gothic UI" pitchFamily="34" charset="-120"/>
               </a:rPr>
-              <a:t>難しい質問はAIが判断して「担当者へ」の導線に切り替え。</a:t>
+              <a:t>GAS を Web アプリとしてデプロイ → URL 発行 → リッチメニューに紐付け。</a:t>
             </a:r>
             <a:endParaRPr lang="en-US" sz="1300" dirty="0"/>
           </a:p>
@@ -2372,7 +2372,7 @@
                 <a:ea typeface="Yu Gothic UI Semibold" pitchFamily="34" charset="-122"/>
                 <a:cs typeface="Yu Gothic UI Semibold" pitchFamily="34" charset="-120"/>
               </a:rPr>
-              <a:t>Gemini API</a:t>
+              <a:t>GAS Web アプリ</a:t>
             </a:r>
             <a:endParaRPr lang="en-US" sz="1600" dirty="0"/>
           </a:p>
@@ -2414,7 +2414,7 @@
                 <a:ea typeface="Yu Gothic UI" pitchFamily="34" charset="-122"/>
                 <a:cs typeface="Yu Gothic UI" pitchFamily="34" charset="-120"/>
               </a:rPr>
-              <a:t>GoogleのAI Gemini を外部プログラムから呼び出すAPI。</a:t>
+              <a:t>Google Apps Script を Web アプリとしてデプロイした状態。</a:t>
             </a:r>
             <a:pPr indent="0" marL="0">
               <a:spcAft>
@@ -2431,7 +2431,7 @@
                 <a:ea typeface="Yu Gothic UI" pitchFamily="34" charset="-122"/>
                 <a:cs typeface="Yu Gothic UI" pitchFamily="34" charset="-120"/>
               </a:rPr>
-              <a:t>GAS からも使える。</a:t>
+              <a:t>URL でアクセスできる Web ページになる。</a:t>
             </a:r>
             <a:endParaRPr lang="en-US" sz="1600" dirty="0"/>
           </a:p>
@@ -2539,7 +2539,7 @@
                 <a:ea typeface="Yu Gothic UI Semibold" pitchFamily="34" charset="-122"/>
                 <a:cs typeface="Yu Gothic UI Semibold" pitchFamily="34" charset="-120"/>
               </a:rPr>
-              <a:t>システムプロンプト</a:t>
+              <a:t>バイブコーディング</a:t>
             </a:r>
             <a:endParaRPr lang="en-US" sz="1600" dirty="0"/>
           </a:p>
@@ -2581,24 +2581,7 @@
                 <a:ea typeface="Yu Gothic UI" pitchFamily="34" charset="-122"/>
                 <a:cs typeface="Yu Gothic UI" pitchFamily="34" charset="-120"/>
               </a:rPr>
-              <a:t>AI に「あなたは○○の役割」と最初に伝える指示文。</a:t>
-            </a:r>
-            <a:pPr indent="0" marL="0">
-              <a:spcAft>
-                <a:spcPts val="600"/>
-              </a:spcAft>
-              <a:buNone/>
-            </a:pPr>
-            <a:r>
-              <a:rPr lang="en-US" sz="1600" dirty="0">
-                <a:solidFill>
-                  <a:srgbClr val="1A1A1A"/>
-                </a:solidFill>
-                <a:latin typeface="Yu Gothic UI" pitchFamily="34" charset="0"/>
-                <a:ea typeface="Yu Gothic UI" pitchFamily="34" charset="-122"/>
-                <a:cs typeface="Yu Gothic UI" pitchFamily="34" charset="-120"/>
-              </a:rPr>
-              <a:t>応答の一貫性を担保。</a:t>
+              <a:t>AI に日本語で「こんな Web アプリが欲しい」と伝えてコードを書かせる作り方。</a:t>
             </a:r>
             <a:endParaRPr lang="en-US" sz="1600" dirty="0"/>
           </a:p>
@@ -2706,7 +2689,7 @@
                 <a:ea typeface="Yu Gothic UI Semibold" pitchFamily="34" charset="-122"/>
                 <a:cs typeface="Yu Gothic UI Semibold" pitchFamily="34" charset="-120"/>
               </a:rPr>
-              <a:t>FAQ 知識</a:t>
+              <a:t>デプロイ</a:t>
             </a:r>
             <a:endParaRPr lang="en-US" sz="1600" dirty="0"/>
           </a:p>
@@ -2748,7 +2731,7 @@
                 <a:ea typeface="Yu Gothic UI" pitchFamily="34" charset="-122"/>
                 <a:cs typeface="Yu Gothic UI" pitchFamily="34" charset="-120"/>
               </a:rPr>
-              <a:t>よくある質問と回答のペアを AI に渡す情報。</a:t>
+              <a:t>作った Web アプリを URL で公開する作業。</a:t>
             </a:r>
             <a:pPr indent="0" marL="0">
               <a:spcAft>
@@ -2765,7 +2748,7 @@
                 <a:ea typeface="Yu Gothic UI" pitchFamily="34" charset="-122"/>
                 <a:cs typeface="Yu Gothic UI" pitchFamily="34" charset="-120"/>
               </a:rPr>
-              <a:t>応答の正確性が上がる。</a:t>
+              <a:t>GAS では「デプロイ &gt; 新しいデプロイ」から。</a:t>
             </a:r>
             <a:endParaRPr lang="en-US" sz="1600" dirty="0"/>
           </a:p>
@@ -2873,7 +2856,7 @@
                 <a:ea typeface="Yu Gothic UI Semibold" pitchFamily="34" charset="-122"/>
                 <a:cs typeface="Yu Gothic UI Semibold" pitchFamily="34" charset="-120"/>
               </a:rPr>
-              <a:t>ハンドオフ</a:t>
+              <a:t>担当者ハンドオフ</a:t>
             </a:r>
             <a:endParaRPr lang="en-US" sz="1600" dirty="0"/>
           </a:p>
@@ -2915,7 +2898,7 @@
                 <a:ea typeface="Yu Gothic UI" pitchFamily="34" charset="-122"/>
                 <a:cs typeface="Yu Gothic UI" pitchFamily="34" charset="-120"/>
               </a:rPr>
-              <a:t>AIが対応困難と判断した会話を、人間の担当者に引き継ぐ仕組み。</a:t>
+              <a:t>チャットボットで答えられない質問を、社内担当者に自動で通知する仕組み。</a:t>
             </a:r>
             <a:endParaRPr lang="en-US" sz="1600" dirty="0"/>
           </a:p>
@@ -2968,7 +2951,7 @@
                 <a:ea typeface="Yu Gothic UI" pitchFamily="34" charset="-122"/>
                 <a:cs typeface="Yu Gothic UI" pitchFamily="34" charset="-120"/>
               </a:rPr>
-              <a:t>Gemini API: </a:t>
+              <a:t>GAS Web アプリ: </a:t>
             </a:r>
             <a:pPr indent="0" marL="0">
               <a:buNone/>
@@ -2982,7 +2965,7 @@
                 <a:ea typeface="Yu Gothic UI" pitchFamily="34" charset="-122"/>
                 <a:cs typeface="Yu Gothic UI" pitchFamily="34" charset="-120"/>
               </a:rPr>
-              <a:t>API キーが必要、無料枠あり   </a:t>
+              <a:t>無料、Googleアカウントで作れる   </a:t>
             </a:r>
             <a:pPr indent="0" marL="0">
               <a:buNone/>
@@ -3010,7 +2993,7 @@
                 <a:ea typeface="Yu Gothic UI" pitchFamily="34" charset="-122"/>
                 <a:cs typeface="Yu Gothic UI" pitchFamily="34" charset="-120"/>
               </a:rPr>
-              <a:t>システムプロンプト: </a:t>
+              <a:t>バイブコーディング: </a:t>
             </a:r>
             <a:pPr indent="0" marL="0">
               <a:buNone/>
@@ -3024,7 +3007,7 @@
                 <a:ea typeface="Yu Gothic UI" pitchFamily="34" charset="-122"/>
                 <a:cs typeface="Yu Gothic UI" pitchFamily="34" charset="-120"/>
               </a:rPr>
-              <a:t>毎回の会話の頭に付ける   </a:t>
+              <a:t>自分で書かず、Gemini に依頼→貼るだけ   </a:t>
             </a:r>
             <a:pPr indent="0" marL="0">
               <a:buNone/>
@@ -3052,7 +3035,7 @@
                 <a:ea typeface="Yu Gothic UI" pitchFamily="34" charset="-122"/>
                 <a:cs typeface="Yu Gothic UI" pitchFamily="34" charset="-120"/>
               </a:rPr>
-              <a:t>FAQ 知識: </a:t>
+              <a:t>デプロイ: </a:t>
             </a:r>
             <a:pPr indent="0" marL="0">
               <a:buNone/>
@@ -3066,7 +3049,7 @@
                 <a:ea typeface="Yu Gothic UI" pitchFamily="34" charset="-122"/>
                 <a:cs typeface="Yu Gothic UI" pitchFamily="34" charset="-120"/>
               </a:rPr>
-              <a:t>PDFやテキストで用意   </a:t>
+              <a:t>アクセス権は「全員」にする   </a:t>
             </a:r>
             <a:pPr indent="0" marL="0">
               <a:buNone/>
@@ -3094,7 +3077,7 @@
                 <a:ea typeface="Yu Gothic UI" pitchFamily="34" charset="-122"/>
                 <a:cs typeface="Yu Gothic UI" pitchFamily="34" charset="-120"/>
               </a:rPr>
-              <a:t>ハンドオフ: </a:t>
+              <a:t>担当者ハンドオフ: </a:t>
             </a:r>
             <a:pPr indent="0" marL="0">
               <a:buNone/>
@@ -3108,7 +3091,7 @@
                 <a:ea typeface="Yu Gothic UI" pitchFamily="34" charset="-122"/>
                 <a:cs typeface="Yu Gothic UI" pitchFamily="34" charset="-120"/>
               </a:rPr>
-              <a:t>事故防止の生命線</a:t>
+              <a:t>メール/Slack 連携が定番</a:t>
             </a:r>
             <a:endParaRPr lang="en-US" sz="1100" dirty="0"/>
           </a:p>
@@ -3199,7 +3182,7 @@
                 <a:ea typeface="Yu Gothic UI Semibold" pitchFamily="34" charset="-122"/>
                 <a:cs typeface="Yu Gothic UI Semibold" pitchFamily="34" charset="-120"/>
               </a:rPr>
-              <a:t>演習1 Gemini API を組み込んで AI 応答化</a:t>
+              <a:t>演習1 FAQ 設計 + Gemini で GAS Web アプリをバイブコーディング</a:t>
             </a:r>
             <a:endParaRPr lang="en-US" sz="2600" dirty="0"/>
           </a:p>
@@ -3327,7 +3310,27 @@
                 <a:ea typeface="Yu Gothic UI" pitchFamily="34" charset="-122"/>
                 <a:cs typeface="Yu Gothic UI" pitchFamily="34" charset="-120"/>
               </a:rPr>
-              <a:t>【場面】キーワード応答は動いたが、想定外の質問に返せない。Gemini API を組み込んで自然対話を可能にする。</a:t>
+              <a:t>【場面】前回作成した公式LINE にお客様からのご質問を想定した FAQ のチャットボットを作りたい。</a:t>
+            </a:r>
+            <a:endParaRPr lang="en-US" sz="1400" dirty="0"/>
+          </a:p>
+          <a:p>
+            <a:pPr indent="0" marL="0">
+              <a:spcAft>
+                <a:spcPts val="400"/>
+              </a:spcAft>
+              <a:buNone/>
+            </a:pPr>
+            <a:r>
+              <a:rPr lang="en-US" sz="1400" dirty="0">
+                <a:solidFill>
+                  <a:srgbClr val="1A1A1A"/>
+                </a:solidFill>
+                <a:latin typeface="Yu Gothic UI" pitchFamily="34" charset="0"/>
+                <a:ea typeface="Yu Gothic UI" pitchFamily="34" charset="-122"/>
+                <a:cs typeface="Yu Gothic UI" pitchFamily="34" charset="-120"/>
+              </a:rPr>
+              <a:t>まず「どんな FAQ が必要か」を設計し、スプシにまとめる → Gemini に GAS Web アプリを生成させる。</a:t>
             </a:r>
             <a:endParaRPr lang="en-US" sz="1400" dirty="0"/>
           </a:p>
@@ -3456,7 +3459,7 @@
                 <a:ea typeface="Yu Gothic UI" pitchFamily="34" charset="-122"/>
                 <a:cs typeface="Yu Gothic UI" pitchFamily="34" charset="-120"/>
               </a:rPr>
-              <a:t>Gemini に「GAS から Gemini API を呼ぶコード」を依頼</a:t>
+              <a:t>FAQ は「質問 / 回答 / カテゴリ(保険種類/手続き/料金 等)」の3列で</a:t>
             </a:r>
             <a:endParaRPr lang="en-US" sz="1400" dirty="0"/>
           </a:p>
@@ -3477,7 +3480,7 @@
                 <a:ea typeface="Yu Gothic UI" pitchFamily="34" charset="-122"/>
                 <a:cs typeface="Yu Gothic UI" pitchFamily="34" charset="-120"/>
               </a:rPr>
-              <a:t>システムプロンプトに「詳細相談は担当者に繋ぐ」ルールを含める</a:t>
+              <a:t>GAS は一から書かず、Gemini に生成させて貼る(バイブコーディング)</a:t>
             </a:r>
             <a:endParaRPr lang="en-US" sz="1400" dirty="0"/>
           </a:p>
@@ -3498,7 +3501,7 @@
                 <a:ea typeface="Yu Gothic UI" pitchFamily="34" charset="-122"/>
                 <a:cs typeface="Yu Gothic UI" pitchFamily="34" charset="-120"/>
               </a:rPr>
-              <a:t>返信は200文字以内に制限(LINE で読みやすく)</a:t>
+              <a:t>最初は10件・1テーマで小さく作る</a:t>
             </a:r>
             <a:endParaRPr lang="en-US" sz="1400" dirty="0"/>
           </a:p>
@@ -3519,7 +3522,7 @@
                 <a:ea typeface="Yu Gothic UI" pitchFamily="34" charset="-122"/>
                 <a:cs typeface="Yu Gothic UI" pitchFamily="34" charset="-120"/>
               </a:rPr>
-              <a:t>API 呼び出し失敗時のフォールバック(定型返答)も入れる</a:t>
+              <a:t>本物の顧客情報は入れない(マスキング)</a:t>
             </a:r>
             <a:endParaRPr lang="en-US" sz="1400" dirty="0"/>
           </a:p>
@@ -3648,7 +3651,7 @@
                 <a:ea typeface="Yu Gothic UI" pitchFamily="34" charset="-122"/>
                 <a:cs typeface="Yu Gothic UI" pitchFamily="34" charset="-120"/>
               </a:rPr>
-              <a:t>【ゴール】Google AI Studio で Gemini API キーを取得</a:t>
+              <a:t>【ゴール】想定される FAQ を10件、スプシに整理(質問 / 回答 / カテゴリ の列)</a:t>
             </a:r>
             <a:endParaRPr lang="en-US" sz="1400" dirty="0"/>
           </a:p>
@@ -3669,7 +3672,7 @@
                 <a:ea typeface="Yu Gothic UI" pitchFamily="34" charset="-122"/>
                 <a:cs typeface="Yu Gothic UI" pitchFamily="34" charset="-120"/>
               </a:rPr>
-              <a:t>GAS のスクリプトプロパティに API キーを保存</a:t>
+              <a:t>Gemini に「この FAQ で動くチャット Web アプリの GAS を書いて」と依頼</a:t>
             </a:r>
             <a:endParaRPr lang="en-US" sz="1400" dirty="0"/>
           </a:p>
@@ -3690,7 +3693,7 @@
                 <a:ea typeface="Yu Gothic UI" pitchFamily="34" charset="-122"/>
                 <a:cs typeface="Yu Gothic UI" pitchFamily="34" charset="-120"/>
               </a:rPr>
-              <a:t>キーワードに当てはまらない質問を Gemini に投げて返信する処理を追加</a:t>
+              <a:t>生成された GAS コードを新規プロジェクトに貼って動作確認(GAS エディタでテスト実行)</a:t>
             </a:r>
             <a:endParaRPr lang="en-US" sz="1400" dirty="0"/>
           </a:p>
@@ -3711,7 +3714,7 @@
                 <a:ea typeface="Yu Gothic UI" pitchFamily="34" charset="-122"/>
                 <a:cs typeface="Yu Gothic UI" pitchFamily="34" charset="-120"/>
               </a:rPr>
-              <a:t>システムプロンプトで「保険営業一次受けのAI」と役割設定</a:t>
+              <a:t>HTML の見た目(タイトル/背景色/フォント) を自分の3軸トーンに合わせる</a:t>
             </a:r>
             <a:endParaRPr lang="en-US" sz="1400" dirty="0"/>
           </a:p>
@@ -3732,7 +3735,7 @@
                 <a:ea typeface="Yu Gothic UI" pitchFamily="34" charset="-122"/>
                 <a:cs typeface="Yu Gothic UI" pitchFamily="34" charset="-120"/>
               </a:rPr>
-              <a:t>実機で自由入力(例:「学資保険どうしたら?」) に応答が返るか確認</a:t>
+              <a:t>答えられない時に「担当者に繋ぐ」案内文を組み込む</a:t>
             </a:r>
             <a:endParaRPr lang="en-US" sz="1400" dirty="0"/>
           </a:p>
@@ -3823,7 +3826,7 @@
                 <a:ea typeface="Yu Gothic UI Semibold" pitchFamily="34" charset="-122"/>
                 <a:cs typeface="Yu Gothic UI Semibold" pitchFamily="34" charset="-120"/>
               </a:rPr>
-              <a:t>演習1 Gemini API を組み込んで AI 応答化 — 観点別チェック</a:t>
+              <a:t>演習1 FAQ 設計 + Gemini で GAS Web アプリをバイブコーディング — 観点別チェック</a:t>
             </a:r>
             <a:endParaRPr lang="en-US" sz="2600" dirty="0"/>
           </a:p>
@@ -3987,7 +3990,7 @@
                 <a:ea typeface="Yu Gothic UI Semibold" pitchFamily="34" charset="-122"/>
                 <a:cs typeface="Yu Gothic UI Semibold" pitchFamily="34" charset="-120"/>
               </a:rPr>
-              <a:t>A. 役割設定の明確化</a:t>
+              <a:t>A. FAQ の粒度</a:t>
             </a:r>
             <a:endParaRPr lang="en-US" sz="1500" dirty="0"/>
           </a:p>
@@ -4040,7 +4043,7 @@
                 <a:ea typeface="Yu Gothic UI" pitchFamily="34" charset="-122"/>
                 <a:cs typeface="Yu Gothic UI" pitchFamily="34" charset="-120"/>
               </a:rPr>
-              <a:t>システムプロンプトで「保険一次受け」の役割が定義できているか</a:t>
+              <a:t>1問1答で、質問文が具体的か</a:t>
             </a:r>
             <a:endParaRPr lang="en-US" sz="1300" dirty="0"/>
           </a:p>
@@ -4093,7 +4096,7 @@
                 <a:ea typeface="Yu Gothic UI" pitchFamily="34" charset="-122"/>
                 <a:cs typeface="Yu Gothic UI" pitchFamily="34" charset="-120"/>
               </a:rPr>
-              <a:t>ロール+ルール+口調 の3要素を含める</a:t>
+              <a:t>「保険について」ではなく「終身保険と定期保険の違いは?」レベルに</a:t>
             </a:r>
             <a:endParaRPr lang="en-US" sz="1300" dirty="0"/>
           </a:p>
@@ -4218,7 +4221,7 @@
                 <a:ea typeface="Yu Gothic UI Semibold" pitchFamily="34" charset="-122"/>
                 <a:cs typeface="Yu Gothic UI Semibold" pitchFamily="34" charset="-120"/>
               </a:rPr>
-              <a:t>B. 文字数制御</a:t>
+              <a:t>B. カテゴリの妥当性</a:t>
             </a:r>
             <a:endParaRPr lang="en-US" sz="1500" dirty="0"/>
           </a:p>
@@ -4271,7 +4274,7 @@
                 <a:ea typeface="Yu Gothic UI" pitchFamily="34" charset="-122"/>
                 <a:cs typeface="Yu Gothic UI" pitchFamily="34" charset="-120"/>
               </a:rPr>
-              <a:t>応答が長すぎず LINE で読みやすいか</a:t>
+              <a:t>カテゴリが3〜5個に絞れているか</a:t>
             </a:r>
             <a:endParaRPr lang="en-US" sz="1300" dirty="0"/>
           </a:p>
@@ -4324,7 +4327,7 @@
                 <a:ea typeface="Yu Gothic UI" pitchFamily="34" charset="-122"/>
                 <a:cs typeface="Yu Gothic UI" pitchFamily="34" charset="-120"/>
               </a:rPr>
-              <a:t>プロンプトで「200文字以内」を明示</a:t>
+              <a:t>多いとフィルタが機能しない、まず3カテゴリから</a:t>
             </a:r>
             <a:endParaRPr lang="en-US" sz="1300" dirty="0"/>
           </a:p>
@@ -4449,7 +4452,7 @@
                 <a:ea typeface="Yu Gothic UI Semibold" pitchFamily="34" charset="-122"/>
                 <a:cs typeface="Yu Gothic UI Semibold" pitchFamily="34" charset="-120"/>
               </a:rPr>
-              <a:t>C. ハルシネーション対策</a:t>
+              <a:t>C. 担当者引き渡しの明確化</a:t>
             </a:r>
             <a:endParaRPr lang="en-US" sz="1500" dirty="0"/>
           </a:p>
@@ -4502,7 +4505,7 @@
                 <a:ea typeface="Yu Gothic UI" pitchFamily="34" charset="-122"/>
                 <a:cs typeface="Yu Gothic UI" pitchFamily="34" charset="-120"/>
               </a:rPr>
-              <a:t>AI が知らない情報を作らないか</a:t>
+              <a:t>答えられない時の案内文が入っているか</a:t>
             </a:r>
             <a:endParaRPr lang="en-US" sz="1300" dirty="0"/>
           </a:p>
@@ -4555,7 +4558,7 @@
                 <a:ea typeface="Yu Gothic UI" pitchFamily="34" charset="-122"/>
                 <a:cs typeface="Yu Gothic UI" pitchFamily="34" charset="-120"/>
               </a:rPr>
-              <a:t>「不明なら不明と答えて、担当者へ繋ぐ」を厳命</a:t>
+              <a:t>「詳細は担当者へ」の1文を必ず含める</a:t>
             </a:r>
             <a:endParaRPr lang="en-US" sz="1300" dirty="0"/>
           </a:p>
@@ -4646,7 +4649,7 @@
                 <a:ea typeface="Yu Gothic UI Semibold" pitchFamily="34" charset="-122"/>
                 <a:cs typeface="Yu Gothic UI Semibold" pitchFamily="34" charset="-120"/>
               </a:rPr>
-              <a:t>演習2 FAQ知識 + ハンドオフ設計</a:t>
+              <a:t>演習2 デプロイ + リッチメニューに紐付け + 担当者通知</a:t>
             </a:r>
             <a:endParaRPr lang="en-US" sz="2600" dirty="0"/>
           </a:p>
@@ -4774,7 +4777,27 @@
                 <a:ea typeface="Yu Gothic UI" pitchFamily="34" charset="-122"/>
                 <a:cs typeface="Yu Gothic UI" pitchFamily="34" charset="-120"/>
               </a:rPr>
-              <a:t>AI 応答は動くが「正しい情報」の担保が必要。自社FAQ を渡し、対応困難な相談は担当者に自動引き渡す設計にする。</a:t>
+              <a:t>GAS Web アプリが動いた。次はデプロイして URL を取得 → リッチメニューに配置 → 実運用に持っていく。</a:t>
+            </a:r>
+            <a:endParaRPr lang="en-US" sz="1400" dirty="0"/>
+          </a:p>
+          <a:p>
+            <a:pPr indent="0" marL="0">
+              <a:spcAft>
+                <a:spcPts val="400"/>
+              </a:spcAft>
+              <a:buNone/>
+            </a:pPr>
+            <a:r>
+              <a:rPr lang="en-US" sz="1400" dirty="0">
+                <a:solidFill>
+                  <a:srgbClr val="1A1A1A"/>
+                </a:solidFill>
+                <a:latin typeface="Yu Gothic UI" pitchFamily="34" charset="0"/>
+                <a:ea typeface="Yu Gothic UI" pitchFamily="34" charset="-122"/>
+                <a:cs typeface="Yu Gothic UI" pitchFamily="34" charset="-120"/>
+              </a:rPr>
+              <a:t>答えられない時は、社内の担当者にメール or Slack で通知する機能も追加する。</a:t>
             </a:r>
             <a:endParaRPr lang="en-US" sz="1400" dirty="0"/>
           </a:p>
@@ -4903,7 +4926,7 @@
                 <a:ea typeface="Yu Gothic UI" pitchFamily="34" charset="-122"/>
                 <a:cs typeface="Yu Gothic UI" pitchFamily="34" charset="-120"/>
               </a:rPr>
-              <a:t>FAQは Q&amp;A ペアで整形しておく(構造化)</a:t>
+              <a:t>デプロイ画面は「デプロイ &gt; 新しいデプロイ &gt; 種類 = ウェブアプリ」</a:t>
             </a:r>
             <a:endParaRPr lang="en-US" sz="1400" dirty="0"/>
           </a:p>
@@ -4924,7 +4947,7 @@
                 <a:ea typeface="Yu Gothic UI" pitchFamily="34" charset="-122"/>
                 <a:cs typeface="Yu Gothic UI" pitchFamily="34" charset="-120"/>
               </a:rPr>
-              <a:t>ハンドオフ判定は AI に「引き渡し必要と判断したら [HANDOFF] を返せ」と指示</a:t>
+              <a:t>アクセス権「全員」を選ぶと URL を持っている人が使える状態に</a:t>
             </a:r>
             <a:endParaRPr lang="en-US" sz="1400" dirty="0"/>
           </a:p>
@@ -4945,7 +4968,7 @@
                 <a:ea typeface="Yu Gothic UI" pitchFamily="34" charset="-122"/>
                 <a:cs typeface="Yu Gothic UI" pitchFamily="34" charset="-120"/>
               </a:rPr>
-              <a:t>[HANDOFF] が返ったら GAS 側で相談員にメール通知</a:t>
+              <a:t>通知メールの本文には「質問内容 + LINEユーザーID + 時刻」を含める</a:t>
             </a:r>
             <a:endParaRPr lang="en-US" sz="1400" dirty="0"/>
           </a:p>
@@ -4966,7 +4989,7 @@
                 <a:ea typeface="Yu Gothic UI" pitchFamily="34" charset="-122"/>
                 <a:cs typeface="Yu Gothic UI" pitchFamily="34" charset="-120"/>
               </a:rPr>
-              <a:t>テストは既知FAQ / 未知の質問 / 不適切な質問 の3種</a:t>
+              <a:t>個別対応する旨を顧客にも自動で通知(「担当者から後ほどご連絡します」)</a:t>
             </a:r>
             <a:endParaRPr lang="en-US" sz="1400" dirty="0"/>
           </a:p>
@@ -5095,7 +5118,7 @@
                 <a:ea typeface="Yu Gothic UI" pitchFamily="34" charset="-122"/>
                 <a:cs typeface="Yu Gothic UI" pitchFamily="34" charset="-120"/>
               </a:rPr>
-              <a:t>自社の保険FAQ(15〜20項目)をテキストで用意</a:t>
+              <a:t>【ゴール】GAS を「Web アプリとしてデプロイ」→ 公開 URL を取得</a:t>
             </a:r>
             <a:endParaRPr lang="en-US" sz="1400" dirty="0"/>
           </a:p>
@@ -5116,7 +5139,7 @@
                 <a:ea typeface="Yu Gothic UI" pitchFamily="34" charset="-122"/>
                 <a:cs typeface="Yu Gothic UI" pitchFamily="34" charset="-120"/>
               </a:rPr>
-              <a:t>GAS でリクエスト時に FAQ をシステムプロンプトに含める(または Gem を作って知識登録)</a:t>
+              <a:t>デプロイ時のアクセス権は「全員」に設定(URL を知っている全員が使える)</a:t>
             </a:r>
             <a:endParaRPr lang="en-US" sz="1400" dirty="0"/>
           </a:p>
@@ -5137,7 +5160,7 @@
                 <a:ea typeface="Yu Gothic UI" pitchFamily="34" charset="-122"/>
                 <a:cs typeface="Yu Gothic UI" pitchFamily="34" charset="-120"/>
               </a:rPr>
-              <a:t>AI が「対応困難」と判断した時、自動で「担当者に繋ぎます」に切り替えて相談員通知メール送信</a:t>
+              <a:t>公式LINE のリッチメニュー1枠に、デプロイ URL を「URL アクション」で設定</a:t>
             </a:r>
             <a:endParaRPr lang="en-US" sz="1400" dirty="0"/>
           </a:p>
@@ -5158,7 +5181,28 @@
                 <a:ea typeface="Yu Gothic UI" pitchFamily="34" charset="-122"/>
                 <a:cs typeface="Yu Gothic UI" pitchFamily="34" charset="-120"/>
               </a:rPr>
-              <a:t>5パターンのテスト質問で「FAQ回答/AI回答/ハンドオフ」の判定精度を確認</a:t>
+              <a:t>「答えられない質問」を検知したら、社内担当者にメール(または Slack Webhook)で通知する機能を追加</a:t>
+            </a:r>
+            <a:endParaRPr lang="en-US" sz="1400" dirty="0"/>
+          </a:p>
+          <a:p>
+            <a:pPr marL="342900" indent="-342900">
+              <a:spcAft>
+                <a:spcPts val="400"/>
+              </a:spcAft>
+              <a:buSzPct val="100000"/>
+              <a:buChar char="●"/>
+            </a:pPr>
+            <a:r>
+              <a:rPr lang="en-US" sz="1400" dirty="0">
+                <a:solidFill>
+                  <a:srgbClr val="1A1A1A"/>
+                </a:solidFill>
+                <a:latin typeface="Yu Gothic UI" pitchFamily="34" charset="0"/>
+                <a:ea typeface="Yu Gothic UI" pitchFamily="34" charset="-122"/>
+                <a:cs typeface="Yu Gothic UI" pitchFamily="34" charset="-120"/>
+              </a:rPr>
+              <a:t>自分のスマホでリッチメニュー → チャットボット → 質問→ 応答 の一連を確認</a:t>
             </a:r>
             <a:endParaRPr lang="en-US" sz="1400" dirty="0"/>
           </a:p>
@@ -5249,7 +5293,7 @@
                 <a:ea typeface="Yu Gothic UI Semibold" pitchFamily="34" charset="-122"/>
                 <a:cs typeface="Yu Gothic UI Semibold" pitchFamily="34" charset="-120"/>
               </a:rPr>
-              <a:t>演習2 FAQ知識 + ハンドオフ設計 — 観点別チェック</a:t>
+              <a:t>演習2 デプロイ + リッチメニューに紐付け + 担当者通知 — 観点別チェック</a:t>
             </a:r>
             <a:endParaRPr lang="en-US" sz="2600" dirty="0"/>
           </a:p>
@@ -5413,7 +5457,7 @@
                 <a:ea typeface="Yu Gothic UI Semibold" pitchFamily="34" charset="-122"/>
                 <a:cs typeface="Yu Gothic UI Semibold" pitchFamily="34" charset="-120"/>
               </a:rPr>
-              <a:t>A. FAQの網羅性</a:t>
+              <a:t>A. デプロイ権限</a:t>
             </a:r>
             <a:endParaRPr lang="en-US" sz="1500" dirty="0"/>
           </a:p>
@@ -5466,7 +5510,7 @@
                 <a:ea typeface="Yu Gothic UI" pitchFamily="34" charset="-122"/>
                 <a:cs typeface="Yu Gothic UI" pitchFamily="34" charset="-120"/>
               </a:rPr>
-              <a:t>頻出15〜20項目をカバーしているか</a:t>
+              <a:t>アクセス権「全員」で公開されているか</a:t>
             </a:r>
             <a:endParaRPr lang="en-US" sz="1300" dirty="0"/>
           </a:p>
@@ -5519,7 +5563,7 @@
                 <a:ea typeface="Yu Gothic UI" pitchFamily="34" charset="-122"/>
                 <a:cs typeface="Yu Gothic UI" pitchFamily="34" charset="-120"/>
               </a:rPr>
-              <a:t>過去の問い合わせログから選定</a:t>
+              <a:t>権限が「自分だけ」だと社外から使えない、要確認</a:t>
             </a:r>
             <a:endParaRPr lang="en-US" sz="1300" dirty="0"/>
           </a:p>
@@ -5644,7 +5688,7 @@
                 <a:ea typeface="Yu Gothic UI Semibold" pitchFamily="34" charset="-122"/>
                 <a:cs typeface="Yu Gothic UI Semibold" pitchFamily="34" charset="-120"/>
               </a:rPr>
-              <a:t>B. ハンドオフ判定の妥当性</a:t>
+              <a:t>B. 通知の実用性</a:t>
             </a:r>
             <a:endParaRPr lang="en-US" sz="1500" dirty="0"/>
           </a:p>
@@ -5697,7 +5741,7 @@
                 <a:ea typeface="Yu Gothic UI" pitchFamily="34" charset="-122"/>
                 <a:cs typeface="Yu Gothic UI" pitchFamily="34" charset="-120"/>
               </a:rPr>
-              <a:t>AI が「引き渡し」判断できるか</a:t>
+              <a:t>担当者にメール/Slack で内容+ユーザーIDが届くか</a:t>
             </a:r>
             <a:endParaRPr lang="en-US" sz="1300" dirty="0"/>
           </a:p>
@@ -5750,7 +5794,7 @@
                 <a:ea typeface="Yu Gothic UI" pitchFamily="34" charset="-122"/>
                 <a:cs typeface="Yu Gothic UI" pitchFamily="34" charset="-120"/>
               </a:rPr>
-              <a:t>判断基準をプロンプトに具体的に列挙</a:t>
+              <a:t>本文に会話履歴と時刻を必ず入れる</a:t>
             </a:r>
             <a:endParaRPr lang="en-US" sz="1300" dirty="0"/>
           </a:p>
@@ -5875,7 +5919,7 @@
                 <a:ea typeface="Yu Gothic UI Semibold" pitchFamily="34" charset="-122"/>
                 <a:cs typeface="Yu Gothic UI Semibold" pitchFamily="34" charset="-120"/>
               </a:rPr>
-              <a:t>C. 通知の運用性</a:t>
+              <a:t>C. 顧客への配慮</a:t>
             </a:r>
             <a:endParaRPr lang="en-US" sz="1500" dirty="0"/>
           </a:p>
@@ -5928,7 +5972,7 @@
                 <a:ea typeface="Yu Gothic UI" pitchFamily="34" charset="-122"/>
                 <a:cs typeface="Yu Gothic UI" pitchFamily="34" charset="-120"/>
               </a:rPr>
-              <a:t>相談員に届く通知が実用的か</a:t>
+              <a:t>答えられない時「担当者から連絡します」と顧客に返しているか</a:t>
             </a:r>
             <a:endParaRPr lang="en-US" sz="1300" dirty="0"/>
           </a:p>
@@ -5981,7 +6025,7 @@
                 <a:ea typeface="Yu Gothic UI" pitchFamily="34" charset="-122"/>
                 <a:cs typeface="Yu Gothic UI" pitchFamily="34" charset="-120"/>
               </a:rPr>
-              <a:t>メール本文に会話履歴+ユーザーIDを必ず含める</a:t>
+              <a:t>AI が黙るのは最悪UX、必ず案内文を返す</a:t>
             </a:r>
             <a:endParaRPr lang="en-US" sz="1300" dirty="0"/>
           </a:p>
@@ -6177,7 +6221,7 @@
                 <a:ea typeface="Yu Gothic UI Semibold" pitchFamily="34" charset="-122"/>
                 <a:cs typeface="Yu Gothic UI Semibold" pitchFamily="34" charset="-120"/>
               </a:rPr>
-              <a:t>キーワードから対話へ</a:t>
+              <a:t>ナレッジ → コード → 公開</a:t>
             </a:r>
             <a:endParaRPr lang="en-US" sz="1800" dirty="0"/>
           </a:p>
@@ -6216,7 +6260,7 @@
                 <a:ea typeface="Yu Gothic UI" pitchFamily="34" charset="-122"/>
                 <a:cs typeface="Yu Gothic UI" pitchFamily="34" charset="-120"/>
               </a:rPr>
-              <a:t>Gemini API で「話せるチャットボット」が今日中に完成。</a:t>
+              <a:t>FAQ をスプシに集めるだけで、Gemini がチャットボットを書いてくれる。</a:t>
             </a:r>
             <a:endParaRPr lang="en-US" sz="1300" dirty="0"/>
           </a:p>
@@ -6321,7 +6365,7 @@
                 <a:ea typeface="Yu Gothic UI Semibold" pitchFamily="34" charset="-122"/>
                 <a:cs typeface="Yu Gothic UI Semibold" pitchFamily="34" charset="-120"/>
               </a:rPr>
-              <a:t>FAQ知識で精度UP</a:t>
+              <a:t>デプロイ URL でどこにでも置ける</a:t>
             </a:r>
             <a:endParaRPr lang="en-US" sz="1800" dirty="0"/>
           </a:p>
@@ -6360,7 +6404,7 @@
                 <a:ea typeface="Yu Gothic UI" pitchFamily="34" charset="-122"/>
                 <a:cs typeface="Yu Gothic UI" pitchFamily="34" charset="-120"/>
               </a:rPr>
-              <a:t>知識を渡すと根拠のある回答に、ハルシネーション激減。</a:t>
+              <a:t>リッチメニュー / LP / メール 全部に貼れる 1つの URL。</a:t>
             </a:r>
             <a:endParaRPr lang="en-US" sz="1300" dirty="0"/>
           </a:p>
@@ -6465,7 +6509,7 @@
                 <a:ea typeface="Yu Gothic UI Semibold" pitchFamily="34" charset="-122"/>
                 <a:cs typeface="Yu Gothic UI Semibold" pitchFamily="34" charset="-120"/>
               </a:rPr>
-              <a:t>AIと人の分業</a:t>
+              <a:t>AI + 担当者の分業</a:t>
             </a:r>
             <a:endParaRPr lang="en-US" sz="1800" dirty="0"/>
           </a:p>
@@ -6504,7 +6548,7 @@
                 <a:ea typeface="Yu Gothic UI" pitchFamily="34" charset="-122"/>
                 <a:cs typeface="Yu Gothic UI" pitchFamily="34" charset="-120"/>
               </a:rPr>
-              <a:t>AI は一次受け、難しい相談は人にバトン。事故を防いで信頼を守る。</a:t>
+              <a:t>答えられない時は担当者へ自動通知。事故を防いで信頼を守る。</a:t>
             </a:r>
             <a:endParaRPr lang="en-US" sz="1300" dirty="0"/>
           </a:p>
